--- a/output/MSFT_Q1FY2027/Earnings_Update_MSFT_Q1FY2027.pptx
+++ b/output/MSFT_Q1FY2027/Earnings_Update_MSFT_Q1FY2027.pptx
@@ -2691,7 +2691,7 @@
                 <a:ea typeface="Nunito" pitchFamily="34" charset="-122"/>
                 <a:cs typeface="Nunito" pitchFamily="34" charset="-120"/>
               </a:rPr>
-              <a:t>We keep Microsoft, a Focus List name, and would add on any capex-driven dip. We underwrite Azure growth near 50% in the first half and Microsoft 365 commercial cloud picking up from 18%, which points to upgrades to the USD 21.2 forward EPS consensus. The debate has moved from demand to returns on USD 170bn of 2026 capex. At 25.2x, below the five-year average of 28.0x, the multiple does not price the pick-up. Next test: the Q2 print in late January.</a:t>
+              <a:t>We are constructive on Microsoft. We underwrite Azure growth near 50% in the first half and Microsoft 365 commercial cloud picking up from 18%, which points to upgrades to the USD 21.2 forward EPS consensus. The debate has moved from demand to returns on USD 170bn of 2026 capex. At 25.2x, below the five-year average of 28.0x, the multiple does not price the pick-up. Next test: the Q2 print in late January.</a:t>
             </a:r>
             <a:endParaRPr lang="en-US" sz="870" dirty="0"/>
           </a:p>
